--- a/EDA_Diabetes_Risikofaktoren.pptx
+++ b/EDA_Diabetes_Risikofaktoren.pptx
@@ -1351,6 +1351,230 @@
                 <a:cs typeface="+mn-cs"/>
               </a:rPr>
             </a:br>
+            <a:endParaRPr lang="de-DE" sz="1200" b="0" i="0" u="none" strike="noStrike" kern="1200" dirty="0">
+              <a:solidFill>
+                <a:schemeClr val="tx1"/>
+              </a:solidFill>
+              <a:effectLst/>
+              <a:latin typeface="+mn-lt"/>
+              <a:ea typeface="+mn-ea"/>
+              <a:cs typeface="+mn-cs"/>
+            </a:endParaRPr>
+          </a:p>
+          <a:p>
+            <a:r>
+              <a:rPr lang="de-DE" sz="1200" b="0" i="0" u="none" strike="noStrike" kern="1200" dirty="0">
+                <a:solidFill>
+                  <a:schemeClr val="tx1"/>
+                </a:solidFill>
+                <a:effectLst/>
+                <a:latin typeface="+mn-lt"/>
+                <a:ea typeface="+mn-ea"/>
+                <a:cs typeface="+mn-cs"/>
+              </a:rPr>
+              <a:t>Erklärung: </a:t>
+            </a:r>
+          </a:p>
+          <a:p>
+            <a:r>
+              <a:rPr lang="de-DE" sz="1200" b="0" u="none" strike="noStrike" kern="1200" dirty="0">
+                <a:solidFill>
+                  <a:schemeClr val="tx1"/>
+                </a:solidFill>
+                <a:effectLst/>
+                <a:latin typeface="+mn-lt"/>
+                <a:ea typeface="+mn-ea"/>
+                <a:cs typeface="+mn-cs"/>
+              </a:rPr>
+              <a:t>Ein wichtiges Ergebnis betrifft Bildung und Einkommen. In den reinen Rohdaten sehen wir ein klares Gefälle. </a:t>
+            </a:r>
+          </a:p>
+          <a:p>
+            <a:r>
+              <a:rPr lang="de-DE" sz="1200" b="0" u="none" strike="noStrike" kern="1200" dirty="0">
+                <a:solidFill>
+                  <a:schemeClr val="tx1"/>
+                </a:solidFill>
+                <a:effectLst/>
+                <a:latin typeface="+mn-lt"/>
+                <a:ea typeface="+mn-ea"/>
+                <a:cs typeface="+mn-cs"/>
+              </a:rPr>
+              <a:t>Ohne Geld oder Schulabschluss liegt die Diabetes-Rate bei fast 25 Prozent.</a:t>
+            </a:r>
+          </a:p>
+          <a:p>
+            <a:r>
+              <a:rPr lang="de-DE" sz="1200" b="0" u="none" strike="noStrike" kern="1200" dirty="0">
+                <a:solidFill>
+                  <a:schemeClr val="tx1"/>
+                </a:solidFill>
+                <a:effectLst/>
+                <a:latin typeface="+mn-lt"/>
+                <a:ea typeface="+mn-ea"/>
+                <a:cs typeface="+mn-cs"/>
+              </a:rPr>
+              <a:t>Im Gesamtmodell zeigt sich eine komplette Kehrtwende. Bildung und Einkommen sinken unter den neutralen Wert von 1,0. </a:t>
+            </a:r>
+          </a:p>
+          <a:p>
+            <a:r>
+              <a:rPr lang="de-DE" sz="1200" b="0" u="none" strike="noStrike" kern="1200" dirty="0">
+                <a:solidFill>
+                  <a:schemeClr val="tx1"/>
+                </a:solidFill>
+                <a:effectLst/>
+                <a:latin typeface="+mn-lt"/>
+                <a:ea typeface="+mn-ea"/>
+                <a:cs typeface="+mn-cs"/>
+              </a:rPr>
+              <a:t>Sie wirken plötzlich als Schutzfaktoren.</a:t>
+            </a:r>
+          </a:p>
+          <a:p>
+            <a:endParaRPr lang="de-DE" sz="1200" b="0" u="none" strike="noStrike" kern="1200" dirty="0">
+              <a:solidFill>
+                <a:schemeClr val="tx1"/>
+              </a:solidFill>
+              <a:effectLst/>
+              <a:latin typeface="+mn-lt"/>
+              <a:ea typeface="+mn-ea"/>
+              <a:cs typeface="+mn-cs"/>
+            </a:endParaRPr>
+          </a:p>
+          <a:p>
+            <a:r>
+              <a:rPr lang="de-DE" sz="1200" b="0" u="none" strike="noStrike" kern="1200" dirty="0">
+                <a:solidFill>
+                  <a:schemeClr val="tx1"/>
+                </a:solidFill>
+                <a:effectLst/>
+                <a:latin typeface="+mn-lt"/>
+                <a:ea typeface="+mn-ea"/>
+                <a:cs typeface="+mn-cs"/>
+              </a:rPr>
+              <a:t>Das bedeutet: </a:t>
+            </a:r>
+          </a:p>
+          <a:p>
+            <a:r>
+              <a:rPr lang="de-DE" sz="1200" b="0" u="none" strike="noStrike" kern="1200" dirty="0">
+                <a:solidFill>
+                  <a:schemeClr val="tx1"/>
+                </a:solidFill>
+                <a:effectLst/>
+                <a:latin typeface="+mn-lt"/>
+                <a:ea typeface="+mn-ea"/>
+                <a:cs typeface="+mn-cs"/>
+              </a:rPr>
+              <a:t>Bei gleichen Rahmenbedingungen sinkt das Risiko mit jeder höheren sozialen Stufe.</a:t>
+            </a:r>
+          </a:p>
+          <a:p>
+            <a:r>
+              <a:rPr lang="de-DE" sz="1200" b="0" u="none" strike="noStrike" kern="1200" dirty="0">
+                <a:solidFill>
+                  <a:schemeClr val="tx1"/>
+                </a:solidFill>
+                <a:effectLst/>
+                <a:latin typeface="+mn-lt"/>
+                <a:ea typeface="+mn-ea"/>
+                <a:cs typeface="+mn-cs"/>
+              </a:rPr>
+              <a:t>Dieser Widerspruch lässt sich einfach auflösen. Ein geringer sozialer Status ist keine biologische Ursache für Diabetes. </a:t>
+            </a:r>
+          </a:p>
+          <a:p>
+            <a:r>
+              <a:rPr lang="de-DE" sz="1200" b="0" u="none" strike="noStrike" kern="1200" dirty="0">
+                <a:solidFill>
+                  <a:schemeClr val="tx1"/>
+                </a:solidFill>
+                <a:effectLst/>
+                <a:latin typeface="+mn-lt"/>
+                <a:ea typeface="+mn-ea"/>
+                <a:cs typeface="+mn-cs"/>
+              </a:rPr>
+              <a:t>Menschen mit weniger Einkommen oder Bildung sind in dieser Stichprobe im Durchschnitt einfach älter und haben ein höheres Gewicht.</a:t>
+            </a:r>
+          </a:p>
+          <a:p>
+            <a:r>
+              <a:rPr lang="de-DE" sz="1200" b="0" u="none" strike="noStrike" kern="1200" dirty="0">
+                <a:solidFill>
+                  <a:schemeClr val="tx1"/>
+                </a:solidFill>
+                <a:effectLst/>
+                <a:latin typeface="+mn-lt"/>
+                <a:ea typeface="+mn-ea"/>
+                <a:cs typeface="+mn-cs"/>
+              </a:rPr>
+              <a:t>Das Gesamtmodell rechnet diese Unterschiede heraus. </a:t>
+            </a:r>
+          </a:p>
+          <a:p>
+            <a:r>
+              <a:rPr lang="de-DE" sz="1200" b="0" u="none" strike="noStrike" kern="1200" dirty="0">
+                <a:solidFill>
+                  <a:schemeClr val="tx1"/>
+                </a:solidFill>
+                <a:effectLst/>
+                <a:latin typeface="+mn-lt"/>
+                <a:ea typeface="+mn-ea"/>
+                <a:cs typeface="+mn-cs"/>
+              </a:rPr>
+              <a:t>Es vergleicht Menschen mit gleichem Alter und gleichem BMI. </a:t>
+            </a:r>
+          </a:p>
+          <a:p>
+            <a:endParaRPr lang="de-DE" sz="1200" b="0" u="none" strike="noStrike" kern="1200">
+              <a:solidFill>
+                <a:schemeClr val="tx1"/>
+              </a:solidFill>
+              <a:effectLst/>
+              <a:latin typeface="+mn-lt"/>
+              <a:ea typeface="+mn-ea"/>
+              <a:cs typeface="+mn-cs"/>
+            </a:endParaRPr>
+          </a:p>
+          <a:p>
+            <a:r>
+              <a:rPr lang="de-DE" sz="1200" b="0" u="none" strike="noStrike" kern="1200">
+                <a:solidFill>
+                  <a:schemeClr val="tx1"/>
+                </a:solidFill>
+                <a:effectLst/>
+                <a:latin typeface="+mn-lt"/>
+                <a:ea typeface="+mn-ea"/>
+                <a:cs typeface="+mn-cs"/>
+              </a:rPr>
+              <a:t>Das </a:t>
+            </a:r>
+            <a:r>
+              <a:rPr lang="de-DE" sz="1200" b="0" u="none" strike="noStrike" kern="1200" dirty="0">
+                <a:solidFill>
+                  <a:schemeClr val="tx1"/>
+                </a:solidFill>
+                <a:effectLst/>
+                <a:latin typeface="+mn-lt"/>
+                <a:ea typeface="+mn-ea"/>
+                <a:cs typeface="+mn-cs"/>
+              </a:rPr>
+              <a:t>Ergebnis zeigt: Bei gleichen medizinischen Werten schützt ein höherer Status im Modell sogar minimal.</a:t>
+            </a:r>
+          </a:p>
+          <a:p>
+            <a:endParaRPr lang="de-DE" sz="1200" b="0" i="0" u="none" strike="noStrike" kern="1200" dirty="0">
+              <a:solidFill>
+                <a:schemeClr val="tx1"/>
+              </a:solidFill>
+              <a:effectLst/>
+              <a:latin typeface="+mn-lt"/>
+              <a:ea typeface="+mn-ea"/>
+              <a:cs typeface="+mn-cs"/>
+            </a:endParaRPr>
+          </a:p>
+          <a:p>
             <a:br>
               <a:rPr lang="de-DE" sz="1200" b="0" i="0" u="none" strike="noStrike" kern="1200" dirty="0">
                 <a:solidFill>
@@ -25703,7 +25927,7 @@
         <p:spPr>
           <a:xfrm>
             <a:off x="583319" y="1734208"/>
-            <a:ext cx="11209287" cy="4761186"/>
+            <a:ext cx="11209287" cy="4437992"/>
           </a:xfrm>
           <a:prstGeom prst="rect">
             <a:avLst/>

--- a/EDA_Diabetes_Risikofaktoren.pptx
+++ b/EDA_Diabetes_Risikofaktoren.pptx
@@ -209,7 +209,7 @@
           <a:p>
             <a:fld id="{4BD2D997-0D67-4CB7-A72A-C0B2A90E5171}" type="datetimeFigureOut">
               <a:rPr lang="de-DE" smtClean="0"/>
-              <a:t>04.06.2026</a:t>
+              <a:t>05.06.2026</a:t>
             </a:fld>
             <a:endParaRPr lang="de-DE" dirty="0"/>
           </a:p>
@@ -1156,14 +1156,83 @@
           <a:p>
             <a:r>
               <a:rPr lang="de-DE" dirty="0"/>
-              <a:t>Das beweist, dass ein geringer Status nicht die biologische Ursache für Diabetes ist, sondern dieser statistisch lediglich mit einem höheren Bluthochdruck, Alter oder höherem BMI einhergeht. </a:t>
-            </a:r>
+              <a:t>Das beweist, dass ein geringer sozialer Status nicht die biologische Ursache für Diabetes ist, sondern dieser statistisch lediglich mit einem höheren Bluthochdruck, Alter oder höherem BMI einhergeht. </a:t>
+            </a:r>
+          </a:p>
+          <a:p>
+            <a:r>
+              <a:rPr lang="de-DE" dirty="0"/>
+              <a:t>d.h.</a:t>
+            </a:r>
+            <a:r>
+              <a:rPr lang="de-DE" sz="1200" b="0" u="none" strike="noStrike" kern="1200" dirty="0">
+                <a:solidFill>
+                  <a:schemeClr val="tx1"/>
+                </a:solidFill>
+                <a:effectLst/>
+                <a:latin typeface="+mn-lt"/>
+                <a:ea typeface="+mn-ea"/>
+                <a:cs typeface="+mn-cs"/>
+              </a:rPr>
+              <a:t> Menschen mit weniger Einkommen oder Bildung sind in dieser Stichprobe im Durchschnitt einfach älter und haben ein höheres Gewicht.</a:t>
+            </a:r>
+          </a:p>
+          <a:p>
+            <a:pPr marL="0" marR="0" lvl="0" indent="0" algn="l" defTabSz="914400" rtl="0" eaLnBrk="1" fontAlgn="auto" latinLnBrk="0" hangingPunct="1">
+              <a:lnSpc>
+                <a:spcPct val="100000"/>
+              </a:lnSpc>
+              <a:spcBef>
+                <a:spcPts val="0"/>
+              </a:spcBef>
+              <a:spcAft>
+                <a:spcPts val="0"/>
+              </a:spcAft>
+              <a:buClrTx/>
+              <a:buSzTx/>
+              <a:buFontTx/>
+              <a:buNone/>
+              <a:tabLst/>
+              <a:defRPr/>
+            </a:pPr>
+            <a:r>
+              <a:rPr lang="de-DE" sz="1200" b="0" u="none" strike="noStrike" kern="1200" dirty="0">
+                <a:solidFill>
+                  <a:schemeClr val="tx1"/>
+                </a:solidFill>
+                <a:effectLst/>
+                <a:latin typeface="+mn-lt"/>
+                <a:ea typeface="+mn-ea"/>
+                <a:cs typeface="+mn-cs"/>
+              </a:rPr>
+              <a:t>Das Gesamtmodell rechnet die Unterschiede heraus. Es vergleicht Menschen mit gleichem Alter und gleichem BMI. </a:t>
+            </a:r>
+          </a:p>
+          <a:p>
+            <a:endParaRPr lang="de-DE" dirty="0"/>
           </a:p>
           <a:p>
             <a:r>
               <a:rPr lang="de-DE" dirty="0"/>
               <a:t>Da kein einziger Fehlerbalken die 1,0 berührt, sind die gezeigten Effekte statistisch korrekt</a:t>
             </a:r>
+          </a:p>
+          <a:p>
+            <a:endParaRPr lang="de-DE" dirty="0"/>
+          </a:p>
+          <a:p>
+            <a:endParaRPr lang="de-DE" sz="1200" b="0" u="none" strike="noStrike" kern="1200" dirty="0">
+              <a:solidFill>
+                <a:schemeClr val="tx1"/>
+              </a:solidFill>
+              <a:effectLst/>
+              <a:latin typeface="+mn-lt"/>
+              <a:ea typeface="+mn-ea"/>
+              <a:cs typeface="+mn-cs"/>
+            </a:endParaRPr>
+          </a:p>
+          <a:p>
+            <a:endParaRPr lang="de-DE" dirty="0"/>
           </a:p>
         </p:txBody>
       </p:sp>
@@ -1430,149 +1499,6 @@
               </a:rPr>
               <a:t>Sie wirken plötzlich als Schutzfaktoren.</a:t>
             </a:r>
-          </a:p>
-          <a:p>
-            <a:endParaRPr lang="de-DE" sz="1200" b="0" u="none" strike="noStrike" kern="1200" dirty="0">
-              <a:solidFill>
-                <a:schemeClr val="tx1"/>
-              </a:solidFill>
-              <a:effectLst/>
-              <a:latin typeface="+mn-lt"/>
-              <a:ea typeface="+mn-ea"/>
-              <a:cs typeface="+mn-cs"/>
-            </a:endParaRPr>
-          </a:p>
-          <a:p>
-            <a:r>
-              <a:rPr lang="de-DE" sz="1200" b="0" u="none" strike="noStrike" kern="1200" dirty="0">
-                <a:solidFill>
-                  <a:schemeClr val="tx1"/>
-                </a:solidFill>
-                <a:effectLst/>
-                <a:latin typeface="+mn-lt"/>
-                <a:ea typeface="+mn-ea"/>
-                <a:cs typeface="+mn-cs"/>
-              </a:rPr>
-              <a:t>Das bedeutet: </a:t>
-            </a:r>
-          </a:p>
-          <a:p>
-            <a:r>
-              <a:rPr lang="de-DE" sz="1200" b="0" u="none" strike="noStrike" kern="1200" dirty="0">
-                <a:solidFill>
-                  <a:schemeClr val="tx1"/>
-                </a:solidFill>
-                <a:effectLst/>
-                <a:latin typeface="+mn-lt"/>
-                <a:ea typeface="+mn-ea"/>
-                <a:cs typeface="+mn-cs"/>
-              </a:rPr>
-              <a:t>Bei gleichen Rahmenbedingungen sinkt das Risiko mit jeder höheren sozialen Stufe.</a:t>
-            </a:r>
-          </a:p>
-          <a:p>
-            <a:r>
-              <a:rPr lang="de-DE" sz="1200" b="0" u="none" strike="noStrike" kern="1200" dirty="0">
-                <a:solidFill>
-                  <a:schemeClr val="tx1"/>
-                </a:solidFill>
-                <a:effectLst/>
-                <a:latin typeface="+mn-lt"/>
-                <a:ea typeface="+mn-ea"/>
-                <a:cs typeface="+mn-cs"/>
-              </a:rPr>
-              <a:t>Dieser Widerspruch lässt sich einfach auflösen. Ein geringer sozialer Status ist keine biologische Ursache für Diabetes. </a:t>
-            </a:r>
-          </a:p>
-          <a:p>
-            <a:r>
-              <a:rPr lang="de-DE" sz="1200" b="0" u="none" strike="noStrike" kern="1200" dirty="0">
-                <a:solidFill>
-                  <a:schemeClr val="tx1"/>
-                </a:solidFill>
-                <a:effectLst/>
-                <a:latin typeface="+mn-lt"/>
-                <a:ea typeface="+mn-ea"/>
-                <a:cs typeface="+mn-cs"/>
-              </a:rPr>
-              <a:t>Menschen mit weniger Einkommen oder Bildung sind in dieser Stichprobe im Durchschnitt einfach älter und haben ein höheres Gewicht.</a:t>
-            </a:r>
-          </a:p>
-          <a:p>
-            <a:r>
-              <a:rPr lang="de-DE" sz="1200" b="0" u="none" strike="noStrike" kern="1200" dirty="0">
-                <a:solidFill>
-                  <a:schemeClr val="tx1"/>
-                </a:solidFill>
-                <a:effectLst/>
-                <a:latin typeface="+mn-lt"/>
-                <a:ea typeface="+mn-ea"/>
-                <a:cs typeface="+mn-cs"/>
-              </a:rPr>
-              <a:t>Das Gesamtmodell rechnet diese Unterschiede heraus. </a:t>
-            </a:r>
-          </a:p>
-          <a:p>
-            <a:r>
-              <a:rPr lang="de-DE" sz="1200" b="0" u="none" strike="noStrike" kern="1200" dirty="0">
-                <a:solidFill>
-                  <a:schemeClr val="tx1"/>
-                </a:solidFill>
-                <a:effectLst/>
-                <a:latin typeface="+mn-lt"/>
-                <a:ea typeface="+mn-ea"/>
-                <a:cs typeface="+mn-cs"/>
-              </a:rPr>
-              <a:t>Es vergleicht Menschen mit gleichem Alter und gleichem BMI. </a:t>
-            </a:r>
-          </a:p>
-          <a:p>
-            <a:endParaRPr lang="de-DE" sz="1200" b="0" u="none" strike="noStrike" kern="1200">
-              <a:solidFill>
-                <a:schemeClr val="tx1"/>
-              </a:solidFill>
-              <a:effectLst/>
-              <a:latin typeface="+mn-lt"/>
-              <a:ea typeface="+mn-ea"/>
-              <a:cs typeface="+mn-cs"/>
-            </a:endParaRPr>
-          </a:p>
-          <a:p>
-            <a:r>
-              <a:rPr lang="de-DE" sz="1200" b="0" u="none" strike="noStrike" kern="1200">
-                <a:solidFill>
-                  <a:schemeClr val="tx1"/>
-                </a:solidFill>
-                <a:effectLst/>
-                <a:latin typeface="+mn-lt"/>
-                <a:ea typeface="+mn-ea"/>
-                <a:cs typeface="+mn-cs"/>
-              </a:rPr>
-              <a:t>Das </a:t>
-            </a:r>
-            <a:r>
-              <a:rPr lang="de-DE" sz="1200" b="0" u="none" strike="noStrike" kern="1200" dirty="0">
-                <a:solidFill>
-                  <a:schemeClr val="tx1"/>
-                </a:solidFill>
-                <a:effectLst/>
-                <a:latin typeface="+mn-lt"/>
-                <a:ea typeface="+mn-ea"/>
-                <a:cs typeface="+mn-cs"/>
-              </a:rPr>
-              <a:t>Ergebnis zeigt: Bei gleichen medizinischen Werten schützt ein höherer Status im Modell sogar minimal.</a:t>
-            </a:r>
-          </a:p>
-          <a:p>
-            <a:endParaRPr lang="de-DE" sz="1200" b="0" i="0" u="none" strike="noStrike" kern="1200" dirty="0">
-              <a:solidFill>
-                <a:schemeClr val="tx1"/>
-              </a:solidFill>
-              <a:effectLst/>
-              <a:latin typeface="+mn-lt"/>
-              <a:ea typeface="+mn-ea"/>
-              <a:cs typeface="+mn-cs"/>
-            </a:endParaRPr>
           </a:p>
           <a:p>
             <a:br>

--- a/EDA_Diabetes_Risikofaktoren.pptx
+++ b/EDA_Diabetes_Risikofaktoren.pptx
@@ -1432,7 +1432,7 @@
           </a:p>
           <a:p>
             <a:r>
-              <a:rPr lang="de-DE" sz="1200" b="0" i="0" u="none" strike="noStrike" kern="1200" dirty="0">
+              <a:rPr lang="de-DE" sz="1200" b="1" i="0" u="none" strike="noStrike" kern="1200" dirty="0">
                 <a:solidFill>
                   <a:schemeClr val="tx1"/>
                 </a:solidFill>
@@ -1455,7 +1455,7 @@
                 <a:ea typeface="+mn-ea"/>
                 <a:cs typeface="+mn-cs"/>
               </a:rPr>
-              <a:t>Ein wichtiges Ergebnis betrifft Bildung und Einkommen. In den reinen Rohdaten sehen wir ein klares Gefälle. </a:t>
+              <a:t>Ein wichtiges Ergebnis betrifft Bildung und Einkommen. </a:t>
             </a:r>
           </a:p>
           <a:p>
@@ -1469,10 +1469,20 @@
                 <a:ea typeface="+mn-ea"/>
                 <a:cs typeface="+mn-cs"/>
               </a:rPr>
-              <a:t>Ohne Geld oder Schulabschluss liegt die Diabetes-Rate bei fast 25 Prozent.</a:t>
-            </a:r>
-          </a:p>
-          <a:p>
+              <a:t>In den reinen </a:t>
+            </a:r>
+            <a:r>
+              <a:rPr lang="de-DE" sz="1200" b="1" u="none" strike="noStrike" kern="1200" dirty="0">
+                <a:solidFill>
+                  <a:schemeClr val="tx1"/>
+                </a:solidFill>
+                <a:effectLst/>
+                <a:latin typeface="+mn-lt"/>
+                <a:ea typeface="+mn-ea"/>
+                <a:cs typeface="+mn-cs"/>
+              </a:rPr>
+              <a:t>Rohdaten</a:t>
+            </a:r>
             <a:r>
               <a:rPr lang="de-DE" sz="1200" b="0" u="none" strike="noStrike" kern="1200" dirty="0">
                 <a:solidFill>
@@ -1483,7 +1493,57 @@
                 <a:ea typeface="+mn-ea"/>
                 <a:cs typeface="+mn-cs"/>
               </a:rPr>
-              <a:t>Im Gesamtmodell zeigt sich eine komplette Kehrtwende. Bildung und Einkommen sinken unter den neutralen Wert von 1,0. </a:t>
+              <a:t> sehen wir ein klares Gefälle. Ohne Geld oder Schulabschluss liegt die </a:t>
+            </a:r>
+            <a:r>
+              <a:rPr lang="de-DE" sz="1200" b="1" u="none" strike="noStrike" kern="1200" dirty="0">
+                <a:solidFill>
+                  <a:schemeClr val="tx1"/>
+                </a:solidFill>
+                <a:effectLst/>
+                <a:latin typeface="+mn-lt"/>
+                <a:ea typeface="+mn-ea"/>
+                <a:cs typeface="+mn-cs"/>
+              </a:rPr>
+              <a:t>Diabetes-Rate bei fast 25%.</a:t>
+            </a:r>
+          </a:p>
+          <a:p>
+            <a:r>
+              <a:rPr lang="de-DE" sz="1200" b="0" u="none" strike="noStrike" kern="1200" dirty="0">
+                <a:solidFill>
+                  <a:schemeClr val="tx1"/>
+                </a:solidFill>
+                <a:effectLst/>
+                <a:latin typeface="+mn-lt"/>
+                <a:ea typeface="+mn-ea"/>
+                <a:cs typeface="+mn-cs"/>
+              </a:rPr>
+              <a:t>Im </a:t>
+            </a:r>
+            <a:r>
+              <a:rPr lang="de-DE" sz="1200" b="1" u="none" strike="noStrike" kern="1200" dirty="0">
+                <a:solidFill>
+                  <a:schemeClr val="tx1"/>
+                </a:solidFill>
+                <a:effectLst/>
+                <a:latin typeface="+mn-lt"/>
+                <a:ea typeface="+mn-ea"/>
+                <a:cs typeface="+mn-cs"/>
+              </a:rPr>
+              <a:t>Gesamtmodell zeigt sich eine komplette Kehrtwende.</a:t>
+            </a:r>
+            <a:r>
+              <a:rPr lang="de-DE" sz="1200" b="0" u="none" strike="noStrike" kern="1200" dirty="0">
+                <a:solidFill>
+                  <a:schemeClr val="tx1"/>
+                </a:solidFill>
+                <a:effectLst/>
+                <a:latin typeface="+mn-lt"/>
+                <a:ea typeface="+mn-ea"/>
+                <a:cs typeface="+mn-cs"/>
+              </a:rPr>
+              <a:t> Bildung und Einkommen sinken unter den neutralen Wert von 1,0. </a:t>
             </a:r>
           </a:p>
           <a:p>

--- a/EDA_Diabetes_Risikofaktoren.pptx
+++ b/EDA_Diabetes_Risikofaktoren.pptx
@@ -24740,19 +24740,16 @@
               </a:spcBef>
             </a:pPr>
             <a:r>
-              <a:rPr lang="de-DE" sz="1400" b="1" dirty="0">
+              <a:rPr lang="de-DE" sz="1400" b="1">
                 <a:latin typeface="Arial" panose="020B0604020202020204" pitchFamily="34" charset="0"/>
                 <a:cs typeface="Arial" panose="020B0604020202020204" pitchFamily="34" charset="0"/>
               </a:rPr>
-              <a:t>Herz-Kreislauf::</a:t>
-            </a:r>
-            <a:r>
-              <a:rPr lang="de-DE" sz="1400" dirty="0">
-                <a:latin typeface="Arial" panose="020B0604020202020204" pitchFamily="34" charset="0"/>
-                <a:cs typeface="Arial" panose="020B0604020202020204" pitchFamily="34" charset="0"/>
-              </a:rPr>
-              <a:t> </a:t>
-            </a:r>
+              <a:t>Herz-Kreislauf:</a:t>
+            </a:r>
+            <a:endParaRPr lang="de-DE" sz="1400" dirty="0">
+              <a:latin typeface="Arial" panose="020B0604020202020204" pitchFamily="34" charset="0"/>
+              <a:cs typeface="Arial" panose="020B0604020202020204" pitchFamily="34" charset="0"/>
+            </a:endParaRPr>
           </a:p>
           <a:p>
             <a:pPr marL="0" indent="0">
